--- a/复赛PPT.pptx
+++ b/复赛PPT.pptx
@@ -3078,6 +3078,10 @@
             <a:prstDash val="solid"/>
           </a:ln>
         </p:spPr>
+        <p:txBody xmlns:a="http://schemas.openxmlformats.org/drawingml/2006/main">
+          <a:bodyPr/>
+          <a:p/>
+        </p:txBody>
       </p:sp>
       <p:sp>
         <p:nvSpPr>
@@ -3233,6 +3237,10 @@
             <a:prstDash val="solid"/>
           </a:ln>
         </p:spPr>
+        <p:txBody xmlns:a="http://schemas.openxmlformats.org/drawingml/2006/main">
+          <a:bodyPr/>
+          <a:p/>
+        </p:txBody>
       </p:sp>
       <p:sp>
         <p:nvSpPr>
@@ -3388,6 +3396,10 @@
             <a:prstDash val="solid"/>
           </a:ln>
         </p:spPr>
+        <p:txBody xmlns:a="http://schemas.openxmlformats.org/drawingml/2006/main">
+          <a:bodyPr/>
+          <a:p/>
+        </p:txBody>
       </p:sp>
       <p:sp>
         <p:nvSpPr>
@@ -3543,6 +3555,10 @@
             <a:prstDash val="solid"/>
           </a:ln>
         </p:spPr>
+        <p:txBody xmlns:a="http://schemas.openxmlformats.org/drawingml/2006/main">
+          <a:bodyPr/>
+          <a:p/>
+        </p:txBody>
       </p:sp>
       <p:sp>
         <p:nvSpPr>
@@ -3665,6 +3681,10 @@
             <a:prstDash val="solid"/>
           </a:ln>
         </p:spPr>
+        <p:txBody xmlns:a="http://schemas.openxmlformats.org/drawingml/2006/main">
+          <a:bodyPr/>
+          <a:p/>
+        </p:txBody>
       </p:sp>
       <p:sp>
         <p:nvSpPr>
@@ -3818,6 +3838,10 @@
             <a:prstDash val="solid"/>
           </a:ln>
         </p:spPr>
+        <p:txBody xmlns:a="http://schemas.openxmlformats.org/drawingml/2006/main">
+          <a:bodyPr/>
+          <a:p/>
+        </p:txBody>
       </p:sp>
       <p:sp>
         <p:nvSpPr>
@@ -3973,6 +3997,10 @@
             <a:prstDash val="solid"/>
           </a:ln>
         </p:spPr>
+        <p:txBody xmlns:a="http://schemas.openxmlformats.org/drawingml/2006/main">
+          <a:bodyPr/>
+          <a:p/>
+        </p:txBody>
       </p:sp>
       <p:sp>
         <p:nvSpPr>
@@ -4188,6 +4216,10 @@
             <a:prstDash val="solid"/>
           </a:ln>
         </p:spPr>
+        <p:txBody xmlns:a="http://schemas.openxmlformats.org/drawingml/2006/main">
+          <a:bodyPr/>
+          <a:p/>
+        </p:txBody>
       </p:sp>
       <p:sp>
         <p:nvSpPr>
@@ -4403,6 +4435,10 @@
             <a:prstDash val="solid"/>
           </a:ln>
         </p:spPr>
+        <p:txBody xmlns:a="http://schemas.openxmlformats.org/drawingml/2006/main">
+          <a:bodyPr/>
+          <a:p/>
+        </p:txBody>
       </p:sp>
       <p:sp>
         <p:nvSpPr>
@@ -4618,6 +4654,10 @@
             <a:prstDash val="solid"/>
           </a:ln>
         </p:spPr>
+        <p:txBody xmlns:a="http://schemas.openxmlformats.org/drawingml/2006/main">
+          <a:bodyPr/>
+          <a:p/>
+        </p:txBody>
       </p:sp>
       <p:sp>
         <p:nvSpPr>
@@ -4833,6 +4873,10 @@
             <a:prstDash val="solid"/>
           </a:ln>
         </p:spPr>
+        <p:txBody xmlns:a="http://schemas.openxmlformats.org/drawingml/2006/main">
+          <a:bodyPr/>
+          <a:p/>
+        </p:txBody>
       </p:sp>
       <p:sp>
         <p:nvSpPr>
@@ -4866,6 +4910,10 @@
             <a:prstDash val="solid"/>
           </a:ln>
         </p:spPr>
+        <p:txBody xmlns:a="http://schemas.openxmlformats.org/drawingml/2006/main">
+          <a:bodyPr/>
+          <a:p/>
+        </p:txBody>
       </p:sp>
       <p:sp>
         <p:nvSpPr>
@@ -4899,6 +4947,10 @@
             <a:prstDash val="solid"/>
           </a:ln>
         </p:spPr>
+        <p:txBody xmlns:a="http://schemas.openxmlformats.org/drawingml/2006/main">
+          <a:bodyPr/>
+          <a:p/>
+        </p:txBody>
       </p:sp>
       <p:sp>
         <p:nvSpPr>
@@ -4994,6 +5046,10 @@
             <a:prstDash val="solid"/>
           </a:ln>
         </p:spPr>
+        <p:txBody xmlns:a="http://schemas.openxmlformats.org/drawingml/2006/main">
+          <a:bodyPr/>
+          <a:p/>
+        </p:txBody>
       </p:sp>
       <p:sp>
         <p:nvSpPr>
@@ -5143,6 +5199,10 @@
             <a:prstDash val="solid"/>
           </a:ln>
         </p:spPr>
+        <p:txBody xmlns:a="http://schemas.openxmlformats.org/drawingml/2006/main">
+          <a:bodyPr/>
+          <a:p/>
+        </p:txBody>
       </p:sp>
       <p:sp>
         <p:nvSpPr>
@@ -5265,6 +5325,10 @@
             <a:prstDash val="solid"/>
           </a:ln>
         </p:spPr>
+        <p:txBody xmlns:a="http://schemas.openxmlformats.org/drawingml/2006/main">
+          <a:bodyPr/>
+          <a:p/>
+        </p:txBody>
       </p:sp>
       <p:sp>
         <p:nvSpPr>
@@ -5387,6 +5451,10 @@
             <a:prstDash val="solid"/>
           </a:ln>
         </p:spPr>
+        <p:txBody xmlns:a="http://schemas.openxmlformats.org/drawingml/2006/main">
+          <a:bodyPr/>
+          <a:p/>
+        </p:txBody>
       </p:sp>
       <p:sp>
         <p:nvSpPr>
@@ -5540,6 +5608,10 @@
             <a:prstDash val="solid"/>
           </a:ln>
         </p:spPr>
+        <p:txBody xmlns:a="http://schemas.openxmlformats.org/drawingml/2006/main">
+          <a:bodyPr/>
+          <a:p/>
+        </p:txBody>
       </p:sp>
       <p:sp>
         <p:nvSpPr>
@@ -5695,6 +5767,10 @@
             <a:prstDash val="solid"/>
           </a:ln>
         </p:spPr>
+        <p:txBody xmlns:a="http://schemas.openxmlformats.org/drawingml/2006/main">
+          <a:bodyPr/>
+          <a:p/>
+        </p:txBody>
       </p:sp>
       <p:sp>
         <p:nvSpPr>
@@ -5904,6 +5980,10 @@
             <a:prstDash val="solid"/>
           </a:ln>
         </p:spPr>
+        <p:txBody xmlns:a="http://schemas.openxmlformats.org/drawingml/2006/main">
+          <a:bodyPr/>
+          <a:p/>
+        </p:txBody>
       </p:sp>
       <p:sp>
         <p:nvSpPr>
@@ -6113,6 +6193,10 @@
             <a:prstDash val="solid"/>
           </a:ln>
         </p:spPr>
+        <p:txBody xmlns:a="http://schemas.openxmlformats.org/drawingml/2006/main">
+          <a:bodyPr/>
+          <a:p/>
+        </p:txBody>
       </p:sp>
       <p:sp>
         <p:nvSpPr>
@@ -6322,6 +6406,10 @@
             <a:prstDash val="solid"/>
           </a:ln>
         </p:spPr>
+        <p:txBody xmlns:a="http://schemas.openxmlformats.org/drawingml/2006/main">
+          <a:bodyPr/>
+          <a:p/>
+        </p:txBody>
       </p:sp>
       <p:sp>
         <p:nvSpPr>
@@ -6444,6 +6532,10 @@
             <a:prstDash val="solid"/>
           </a:ln>
         </p:spPr>
+        <p:txBody xmlns:a="http://schemas.openxmlformats.org/drawingml/2006/main">
+          <a:bodyPr/>
+          <a:p/>
+        </p:txBody>
       </p:sp>
       <p:sp>
         <p:nvSpPr>
@@ -6597,6 +6689,10 @@
             <a:prstDash val="solid"/>
           </a:ln>
         </p:spPr>
+        <p:txBody xmlns:a="http://schemas.openxmlformats.org/drawingml/2006/main">
+          <a:bodyPr/>
+          <a:p/>
+        </p:txBody>
       </p:sp>
       <p:sp>
         <p:nvSpPr>
@@ -6752,6 +6848,10 @@
             <a:prstDash val="solid"/>
           </a:ln>
         </p:spPr>
+        <p:txBody xmlns:a="http://schemas.openxmlformats.org/drawingml/2006/main">
+          <a:bodyPr/>
+          <a:p/>
+        </p:txBody>
       </p:sp>
       <p:sp>
         <p:nvSpPr>
@@ -6907,6 +7007,10 @@
             <a:prstDash val="solid"/>
           </a:ln>
         </p:spPr>
+        <p:txBody xmlns:a="http://schemas.openxmlformats.org/drawingml/2006/main">
+          <a:bodyPr/>
+          <a:p/>
+        </p:txBody>
       </p:sp>
       <p:sp>
         <p:nvSpPr>
@@ -7062,6 +7166,10 @@
             <a:prstDash val="solid"/>
           </a:ln>
         </p:spPr>
+        <p:txBody xmlns:a="http://schemas.openxmlformats.org/drawingml/2006/main">
+          <a:bodyPr/>
+          <a:p/>
+        </p:txBody>
       </p:sp>
       <p:sp>
         <p:nvSpPr>
@@ -7217,6 +7325,10 @@
             <a:prstDash val="solid"/>
           </a:ln>
         </p:spPr>
+        <p:txBody xmlns:a="http://schemas.openxmlformats.org/drawingml/2006/main">
+          <a:bodyPr/>
+          <a:p/>
+        </p:txBody>
       </p:sp>
       <p:sp>
         <p:nvSpPr>
@@ -7372,6 +7484,10 @@
             <a:prstDash val="solid"/>
           </a:ln>
         </p:spPr>
+        <p:txBody xmlns:a="http://schemas.openxmlformats.org/drawingml/2006/main">
+          <a:bodyPr/>
+          <a:p/>
+        </p:txBody>
       </p:sp>
       <p:sp>
         <p:nvSpPr>
@@ -7527,6 +7643,10 @@
             <a:prstDash val="solid"/>
           </a:ln>
         </p:spPr>
+        <p:txBody xmlns:a="http://schemas.openxmlformats.org/drawingml/2006/main">
+          <a:bodyPr/>
+          <a:p/>
+        </p:txBody>
       </p:sp>
       <p:sp>
         <p:nvSpPr>
@@ -7622,6 +7742,10 @@
             <a:prstDash val="solid"/>
           </a:ln>
         </p:spPr>
+        <p:txBody xmlns:a="http://schemas.openxmlformats.org/drawingml/2006/main">
+          <a:bodyPr/>
+          <a:p/>
+        </p:txBody>
       </p:sp>
       <p:sp>
         <p:nvSpPr>
@@ -7777,6 +7901,10 @@
             <a:prstDash val="solid"/>
           </a:ln>
         </p:spPr>
+        <p:txBody xmlns:a="http://schemas.openxmlformats.org/drawingml/2006/main">
+          <a:bodyPr/>
+          <a:p/>
+        </p:txBody>
       </p:sp>
       <p:sp>
         <p:nvSpPr>
@@ -7932,6 +8060,10 @@
             <a:prstDash val="solid"/>
           </a:ln>
         </p:spPr>
+        <p:txBody xmlns:a="http://schemas.openxmlformats.org/drawingml/2006/main">
+          <a:bodyPr/>
+          <a:p/>
+        </p:txBody>
       </p:sp>
       <p:sp>
         <p:nvSpPr>
@@ -8087,6 +8219,10 @@
             <a:prstDash val="solid"/>
           </a:ln>
         </p:spPr>
+        <p:txBody xmlns:a="http://schemas.openxmlformats.org/drawingml/2006/main">
+          <a:bodyPr/>
+          <a:p/>
+        </p:txBody>
       </p:sp>
       <p:sp>
         <p:nvSpPr>
@@ -8329,6 +8465,10 @@
             <a:prstDash val="solid"/>
           </a:ln>
         </p:spPr>
+        <p:txBody xmlns:a="http://schemas.openxmlformats.org/drawingml/2006/main">
+          <a:bodyPr/>
+          <a:p/>
+        </p:txBody>
       </p:sp>
       <p:sp>
         <p:nvSpPr>
@@ -8482,6 +8622,10 @@
             <a:prstDash val="solid"/>
           </a:ln>
         </p:spPr>
+        <p:txBody xmlns:a="http://schemas.openxmlformats.org/drawingml/2006/main">
+          <a:bodyPr/>
+          <a:p/>
+        </p:txBody>
       </p:sp>
       <p:sp>
         <p:nvSpPr>
@@ -8637,6 +8781,10 @@
             <a:prstDash val="solid"/>
           </a:ln>
         </p:spPr>
+        <p:txBody xmlns:a="http://schemas.openxmlformats.org/drawingml/2006/main">
+          <a:bodyPr/>
+          <a:p/>
+        </p:txBody>
       </p:sp>
       <p:sp>
         <p:nvSpPr>
@@ -8852,6 +9000,10 @@
             <a:prstDash val="solid"/>
           </a:ln>
         </p:spPr>
+        <p:txBody xmlns:a="http://schemas.openxmlformats.org/drawingml/2006/main">
+          <a:bodyPr/>
+          <a:p/>
+        </p:txBody>
       </p:sp>
       <p:sp>
         <p:nvSpPr>
@@ -9067,6 +9219,10 @@
             <a:prstDash val="solid"/>
           </a:ln>
         </p:spPr>
+        <p:txBody xmlns:a="http://schemas.openxmlformats.org/drawingml/2006/main">
+          <a:bodyPr/>
+          <a:p/>
+        </p:txBody>
       </p:sp>
       <p:sp>
         <p:nvSpPr>
@@ -9282,6 +9438,10 @@
             <a:prstDash val="solid"/>
           </a:ln>
         </p:spPr>
+        <p:txBody xmlns:a="http://schemas.openxmlformats.org/drawingml/2006/main">
+          <a:bodyPr/>
+          <a:p/>
+        </p:txBody>
       </p:sp>
       <p:sp>
         <p:nvSpPr>
@@ -9497,6 +9657,10 @@
             <a:prstDash val="solid"/>
           </a:ln>
         </p:spPr>
+        <p:txBody xmlns:a="http://schemas.openxmlformats.org/drawingml/2006/main">
+          <a:bodyPr/>
+          <a:p/>
+        </p:txBody>
       </p:sp>
       <p:sp>
         <p:nvSpPr>
@@ -9592,6 +9756,10 @@
             <a:prstDash val="solid"/>
           </a:ln>
         </p:spPr>
+        <p:txBody xmlns:a="http://schemas.openxmlformats.org/drawingml/2006/main">
+          <a:bodyPr/>
+          <a:p/>
+        </p:txBody>
       </p:sp>
       <p:sp>
         <p:nvSpPr>
@@ -9747,6 +9915,10 @@
             <a:prstDash val="solid"/>
           </a:ln>
         </p:spPr>
+        <p:txBody xmlns:a="http://schemas.openxmlformats.org/drawingml/2006/main">
+          <a:bodyPr/>
+          <a:p/>
+        </p:txBody>
       </p:sp>
       <p:sp>
         <p:nvSpPr>
@@ -9902,6 +10074,10 @@
             <a:prstDash val="solid"/>
           </a:ln>
         </p:spPr>
+        <p:txBody xmlns:a="http://schemas.openxmlformats.org/drawingml/2006/main">
+          <a:bodyPr/>
+          <a:p/>
+        </p:txBody>
       </p:sp>
       <p:sp>
         <p:nvSpPr>
@@ -10057,6 +10233,10 @@
             <a:prstDash val="solid"/>
           </a:ln>
         </p:spPr>
+        <p:txBody xmlns:a="http://schemas.openxmlformats.org/drawingml/2006/main">
+          <a:bodyPr/>
+          <a:p/>
+        </p:txBody>
       </p:sp>
       <p:sp>
         <p:nvSpPr>
@@ -10239,6 +10419,10 @@
             <a:prstDash val="solid"/>
           </a:ln>
         </p:spPr>
+        <p:txBody xmlns:a="http://schemas.openxmlformats.org/drawingml/2006/main">
+          <a:bodyPr/>
+          <a:p/>
+        </p:txBody>
       </p:sp>
       <p:sp>
         <p:nvSpPr>
@@ -10392,6 +10576,10 @@
             <a:prstDash val="solid"/>
           </a:ln>
         </p:spPr>
+        <p:txBody xmlns:a="http://schemas.openxmlformats.org/drawingml/2006/main">
+          <a:bodyPr/>
+          <a:p/>
+        </p:txBody>
       </p:sp>
       <p:sp>
         <p:nvSpPr>
@@ -10547,6 +10735,10 @@
             <a:prstDash val="solid"/>
           </a:ln>
         </p:spPr>
+        <p:txBody xmlns:a="http://schemas.openxmlformats.org/drawingml/2006/main">
+          <a:bodyPr/>
+          <a:p/>
+        </p:txBody>
       </p:sp>
       <p:sp>
         <p:nvSpPr>
@@ -10762,6 +10954,10 @@
             <a:prstDash val="solid"/>
           </a:ln>
         </p:spPr>
+        <p:txBody xmlns:a="http://schemas.openxmlformats.org/drawingml/2006/main">
+          <a:bodyPr/>
+          <a:p/>
+        </p:txBody>
       </p:sp>
       <p:sp>
         <p:nvSpPr>
@@ -10977,6 +11173,10 @@
             <a:prstDash val="solid"/>
           </a:ln>
         </p:spPr>
+        <p:txBody xmlns:a="http://schemas.openxmlformats.org/drawingml/2006/main">
+          <a:bodyPr/>
+          <a:p/>
+        </p:txBody>
       </p:sp>
       <p:sp>
         <p:nvSpPr>
@@ -11192,6 +11392,10 @@
             <a:prstDash val="solid"/>
           </a:ln>
         </p:spPr>
+        <p:txBody xmlns:a="http://schemas.openxmlformats.org/drawingml/2006/main">
+          <a:bodyPr/>
+          <a:p/>
+        </p:txBody>
       </p:sp>
       <p:sp>
         <p:nvSpPr>
@@ -11407,6 +11611,10 @@
             <a:prstDash val="solid"/>
           </a:ln>
         </p:spPr>
+        <p:txBody xmlns:a="http://schemas.openxmlformats.org/drawingml/2006/main">
+          <a:bodyPr/>
+          <a:p/>
+        </p:txBody>
       </p:sp>
       <p:sp>
         <p:nvSpPr>
@@ -11502,6 +11710,10 @@
             <a:prstDash val="solid"/>
           </a:ln>
         </p:spPr>
+        <p:txBody xmlns:a="http://schemas.openxmlformats.org/drawingml/2006/main">
+          <a:bodyPr/>
+          <a:p/>
+        </p:txBody>
       </p:sp>
       <p:sp>
         <p:nvSpPr>
@@ -11597,6 +11809,10 @@
             <a:prstDash val="solid"/>
           </a:ln>
         </p:spPr>
+        <p:txBody xmlns:a="http://schemas.openxmlformats.org/drawingml/2006/main">
+          <a:bodyPr/>
+          <a:p/>
+        </p:txBody>
       </p:sp>
       <p:sp>
         <p:nvSpPr>
@@ -11692,6 +11908,10 @@
             <a:prstDash val="solid"/>
           </a:ln>
         </p:spPr>
+        <p:txBody xmlns:a="http://schemas.openxmlformats.org/drawingml/2006/main">
+          <a:bodyPr/>
+          <a:p/>
+        </p:txBody>
       </p:sp>
       <p:sp>
         <p:nvSpPr>
@@ -11814,6 +12034,10 @@
             <a:prstDash val="solid"/>
           </a:ln>
         </p:spPr>
+        <p:txBody xmlns:a="http://schemas.openxmlformats.org/drawingml/2006/main">
+          <a:bodyPr/>
+          <a:p/>
+        </p:txBody>
       </p:sp>
       <p:sp>
         <p:nvSpPr>
@@ -11967,6 +12191,10 @@
             <a:prstDash val="solid"/>
           </a:ln>
         </p:spPr>
+        <p:txBody xmlns:a="http://schemas.openxmlformats.org/drawingml/2006/main">
+          <a:bodyPr/>
+          <a:p/>
+        </p:txBody>
       </p:sp>
       <p:sp>
         <p:nvSpPr>
@@ -12122,6 +12350,10 @@
             <a:prstDash val="solid"/>
           </a:ln>
         </p:spPr>
+        <p:txBody xmlns:a="http://schemas.openxmlformats.org/drawingml/2006/main">
+          <a:bodyPr/>
+          <a:p/>
+        </p:txBody>
       </p:sp>
       <p:sp>
         <p:nvSpPr>
@@ -12331,6 +12563,10 @@
             <a:prstDash val="solid"/>
           </a:ln>
         </p:spPr>
+        <p:txBody xmlns:a="http://schemas.openxmlformats.org/drawingml/2006/main">
+          <a:bodyPr/>
+          <a:p/>
+        </p:txBody>
       </p:sp>
       <p:sp>
         <p:nvSpPr>
@@ -12540,6 +12776,10 @@
             <a:prstDash val="solid"/>
           </a:ln>
         </p:spPr>
+        <p:txBody xmlns:a="http://schemas.openxmlformats.org/drawingml/2006/main">
+          <a:bodyPr/>
+          <a:p/>
+        </p:txBody>
       </p:sp>
       <p:sp>
         <p:nvSpPr>
@@ -12662,6 +12902,10 @@
             <a:prstDash val="solid"/>
           </a:ln>
         </p:spPr>
+        <p:txBody xmlns:a="http://schemas.openxmlformats.org/drawingml/2006/main">
+          <a:bodyPr/>
+          <a:p/>
+        </p:txBody>
       </p:sp>
       <p:sp>
         <p:nvSpPr>
@@ -12815,6 +13059,10 @@
             <a:prstDash val="solid"/>
           </a:ln>
         </p:spPr>
+        <p:txBody xmlns:a="http://schemas.openxmlformats.org/drawingml/2006/main">
+          <a:bodyPr/>
+          <a:p/>
+        </p:txBody>
       </p:sp>
       <p:sp>
         <p:nvSpPr>
@@ -12970,6 +13218,10 @@
             <a:prstDash val="solid"/>
           </a:ln>
         </p:spPr>
+        <p:txBody xmlns:a="http://schemas.openxmlformats.org/drawingml/2006/main">
+          <a:bodyPr/>
+          <a:p/>
+        </p:txBody>
       </p:sp>
       <p:sp>
         <p:nvSpPr>
@@ -13212,6 +13464,10 @@
             <a:prstDash val="solid"/>
           </a:ln>
         </p:spPr>
+        <p:txBody xmlns:a="http://schemas.openxmlformats.org/drawingml/2006/main">
+          <a:bodyPr/>
+          <a:p/>
+        </p:txBody>
       </p:sp>
       <p:sp>
         <p:nvSpPr>
@@ -13367,6 +13623,10 @@
             <a:prstDash val="solid"/>
           </a:ln>
         </p:spPr>
+        <p:txBody xmlns:a="http://schemas.openxmlformats.org/drawingml/2006/main">
+          <a:bodyPr/>
+          <a:p/>
+        </p:txBody>
       </p:sp>
       <p:sp>
         <p:nvSpPr>
@@ -13522,6 +13782,10 @@
             <a:prstDash val="solid"/>
           </a:ln>
         </p:spPr>
+        <p:txBody xmlns:a="http://schemas.openxmlformats.org/drawingml/2006/main">
+          <a:bodyPr/>
+          <a:p/>
+        </p:txBody>
       </p:sp>
       <p:sp>
         <p:nvSpPr>
@@ -13677,6 +13941,10 @@
             <a:prstDash val="solid"/>
           </a:ln>
         </p:spPr>
+        <p:txBody xmlns:a="http://schemas.openxmlformats.org/drawingml/2006/main">
+          <a:bodyPr/>
+          <a:p/>
+        </p:txBody>
       </p:sp>
       <p:sp>
         <p:nvSpPr>
@@ -13859,6 +14127,10 @@
             <a:prstDash val="solid"/>
           </a:ln>
         </p:spPr>
+        <p:txBody xmlns:a="http://schemas.openxmlformats.org/drawingml/2006/main">
+          <a:bodyPr/>
+          <a:p/>
+        </p:txBody>
       </p:sp>
       <p:sp>
         <p:nvSpPr>
@@ -14012,6 +14284,10 @@
             <a:prstDash val="solid"/>
           </a:ln>
         </p:spPr>
+        <p:txBody xmlns:a="http://schemas.openxmlformats.org/drawingml/2006/main">
+          <a:bodyPr/>
+          <a:p/>
+        </p:txBody>
       </p:sp>
       <p:sp>
         <p:nvSpPr>
@@ -14167,6 +14443,10 @@
             <a:prstDash val="solid"/>
           </a:ln>
         </p:spPr>
+        <p:txBody xmlns:a="http://schemas.openxmlformats.org/drawingml/2006/main">
+          <a:bodyPr/>
+          <a:p/>
+        </p:txBody>
       </p:sp>
       <p:sp>
         <p:nvSpPr>
@@ -14403,6 +14683,10 @@
             <a:prstDash val="solid"/>
           </a:ln>
         </p:spPr>
+        <p:txBody xmlns:a="http://schemas.openxmlformats.org/drawingml/2006/main">
+          <a:bodyPr/>
+          <a:p/>
+        </p:txBody>
       </p:sp>
       <p:sp>
         <p:nvSpPr>
@@ -14498,6 +14782,10 @@
             <a:prstDash val="solid"/>
           </a:ln>
         </p:spPr>
+        <p:txBody xmlns:a="http://schemas.openxmlformats.org/drawingml/2006/main">
+          <a:bodyPr/>
+          <a:p/>
+        </p:txBody>
       </p:sp>
       <p:sp>
         <p:nvSpPr>
@@ -14653,6 +14941,10 @@
             <a:prstDash val="solid"/>
           </a:ln>
         </p:spPr>
+        <p:txBody xmlns:a="http://schemas.openxmlformats.org/drawingml/2006/main">
+          <a:bodyPr/>
+          <a:p/>
+        </p:txBody>
       </p:sp>
       <p:sp>
         <p:nvSpPr>
@@ -14808,6 +15100,10 @@
             <a:prstDash val="solid"/>
           </a:ln>
         </p:spPr>
+        <p:txBody xmlns:a="http://schemas.openxmlformats.org/drawingml/2006/main">
+          <a:bodyPr/>
+          <a:p/>
+        </p:txBody>
       </p:sp>
       <p:sp>
         <p:nvSpPr>
@@ -14963,6 +15259,10 @@
             <a:prstDash val="solid"/>
           </a:ln>
         </p:spPr>
+        <p:txBody xmlns:a="http://schemas.openxmlformats.org/drawingml/2006/main">
+          <a:bodyPr/>
+          <a:p/>
+        </p:txBody>
       </p:sp>
       <p:sp>
         <p:nvSpPr>
@@ -15259,6 +15559,10 @@
             <a:prstDash val="solid"/>
           </a:ln>
         </p:spPr>
+        <p:txBody xmlns:a="http://schemas.openxmlformats.org/drawingml/2006/main">
+          <a:bodyPr/>
+          <a:p/>
+        </p:txBody>
       </p:sp>
       <p:sp>
         <p:nvSpPr>
@@ -15412,6 +15716,10 @@
             <a:prstDash val="solid"/>
           </a:ln>
         </p:spPr>
+        <p:txBody xmlns:a="http://schemas.openxmlformats.org/drawingml/2006/main">
+          <a:bodyPr/>
+          <a:p/>
+        </p:txBody>
       </p:sp>
       <p:sp>
         <p:nvSpPr>
@@ -15567,6 +15875,10 @@
             <a:prstDash val="solid"/>
           </a:ln>
         </p:spPr>
+        <p:txBody xmlns:a="http://schemas.openxmlformats.org/drawingml/2006/main">
+          <a:bodyPr/>
+          <a:p/>
+        </p:txBody>
       </p:sp>
       <p:sp>
         <p:nvSpPr>
@@ -15782,6 +16094,10 @@
             <a:prstDash val="solid"/>
           </a:ln>
         </p:spPr>
+        <p:txBody xmlns:a="http://schemas.openxmlformats.org/drawingml/2006/main">
+          <a:bodyPr/>
+          <a:p/>
+        </p:txBody>
       </p:sp>
       <p:sp>
         <p:nvSpPr>
@@ -15997,6 +16313,10 @@
             <a:prstDash val="solid"/>
           </a:ln>
         </p:spPr>
+        <p:txBody xmlns:a="http://schemas.openxmlformats.org/drawingml/2006/main">
+          <a:bodyPr/>
+          <a:p/>
+        </p:txBody>
       </p:sp>
       <p:sp>
         <p:nvSpPr>
@@ -16212,6 +16532,10 @@
             <a:prstDash val="solid"/>
           </a:ln>
         </p:spPr>
+        <p:txBody xmlns:a="http://schemas.openxmlformats.org/drawingml/2006/main">
+          <a:bodyPr/>
+          <a:p/>
+        </p:txBody>
       </p:sp>
       <p:sp>
         <p:nvSpPr>
@@ -16268,7 +16592,7 @@
                 <a:ea typeface="Microsoft YaHei"/>
                 <a:cs typeface="Microsoft YaHei"/>
               </a:rPr>
-              <a:t>94/95</a:t>
+              <a:t>97/97</a:t>
             </a:r>
           </a:p>
         </p:txBody>
@@ -16388,7 +16712,7 @@
                 <a:ea typeface="Microsoft YaHei"/>
                 <a:cs typeface="Microsoft YaHei"/>
               </a:rPr>
-              <a:t>唯一失败为文件路径迁移</a:t>
+              <a:t>全部通过，含 Lab Factory 发布链路</a:t>
             </a:r>
           </a:p>
         </p:txBody>
@@ -16427,6 +16751,10 @@
             <a:prstDash val="solid"/>
           </a:ln>
         </p:spPr>
+        <p:txBody xmlns:a="http://schemas.openxmlformats.org/drawingml/2006/main">
+          <a:bodyPr/>
+          <a:p/>
+        </p:txBody>
       </p:sp>
       <p:sp>
         <p:nvSpPr>
@@ -16642,6 +16970,10 @@
             <a:prstDash val="solid"/>
           </a:ln>
         </p:spPr>
+        <p:txBody xmlns:a="http://schemas.openxmlformats.org/drawingml/2006/main">
+          <a:bodyPr/>
+          <a:p/>
+        </p:txBody>
       </p:sp>
       <p:sp>
         <p:nvSpPr>
@@ -16944,6 +17276,10 @@
             <a:prstDash val="solid"/>
           </a:ln>
         </p:spPr>
+        <p:txBody xmlns:a="http://schemas.openxmlformats.org/drawingml/2006/main">
+          <a:bodyPr/>
+          <a:p/>
+        </p:txBody>
       </p:sp>
       <p:sp>
         <p:nvSpPr>
@@ -17097,6 +17433,10 @@
             <a:prstDash val="solid"/>
           </a:ln>
         </p:spPr>
+        <p:txBody xmlns:a="http://schemas.openxmlformats.org/drawingml/2006/main">
+          <a:bodyPr/>
+          <a:p/>
+        </p:txBody>
       </p:sp>
       <p:sp>
         <p:nvSpPr>
@@ -17955,6 +18295,10 @@
             <a:prstDash val="solid"/>
           </a:ln>
         </p:spPr>
+        <p:txBody xmlns:a="http://schemas.openxmlformats.org/drawingml/2006/main">
+          <a:bodyPr/>
+          <a:p/>
+        </p:txBody>
       </p:sp>
       <p:sp>
         <p:nvSpPr>
@@ -18108,6 +18452,10 @@
             <a:prstDash val="solid"/>
           </a:ln>
         </p:spPr>
+        <p:txBody xmlns:a="http://schemas.openxmlformats.org/drawingml/2006/main">
+          <a:bodyPr/>
+          <a:p/>
+        </p:txBody>
       </p:sp>
       <p:sp>
         <p:nvSpPr>
@@ -18263,6 +18611,10 @@
             <a:prstDash val="solid"/>
           </a:ln>
         </p:spPr>
+        <p:txBody xmlns:a="http://schemas.openxmlformats.org/drawingml/2006/main">
+          <a:bodyPr/>
+          <a:p/>
+        </p:txBody>
       </p:sp>
       <p:sp>
         <p:nvSpPr>
@@ -18298,6 +18650,10 @@
             <a:prstDash val="solid"/>
           </a:ln>
         </p:spPr>
+        <p:txBody xmlns:a="http://schemas.openxmlformats.org/drawingml/2006/main">
+          <a:bodyPr/>
+          <a:p/>
+        </p:txBody>
       </p:sp>
       <p:sp>
         <p:nvSpPr>
@@ -18513,6 +18869,10 @@
             <a:prstDash val="solid"/>
           </a:ln>
         </p:spPr>
+        <p:txBody xmlns:a="http://schemas.openxmlformats.org/drawingml/2006/main">
+          <a:bodyPr/>
+          <a:p/>
+        </p:txBody>
       </p:sp>
       <p:sp>
         <p:nvSpPr>
@@ -18548,6 +18908,10 @@
             <a:prstDash val="solid"/>
           </a:ln>
         </p:spPr>
+        <p:txBody xmlns:a="http://schemas.openxmlformats.org/drawingml/2006/main">
+          <a:bodyPr/>
+          <a:p/>
+        </p:txBody>
       </p:sp>
       <p:sp>
         <p:nvSpPr>
@@ -18763,6 +19127,10 @@
             <a:prstDash val="solid"/>
           </a:ln>
         </p:spPr>
+        <p:txBody xmlns:a="http://schemas.openxmlformats.org/drawingml/2006/main">
+          <a:bodyPr/>
+          <a:p/>
+        </p:txBody>
       </p:sp>
       <p:sp>
         <p:nvSpPr>
@@ -18798,6 +19166,10 @@
             <a:prstDash val="solid"/>
           </a:ln>
         </p:spPr>
+        <p:txBody xmlns:a="http://schemas.openxmlformats.org/drawingml/2006/main">
+          <a:bodyPr/>
+          <a:p/>
+        </p:txBody>
       </p:sp>
       <p:sp>
         <p:nvSpPr>
@@ -19011,6 +19383,10 @@
             <a:prstDash val="solid"/>
           </a:ln>
         </p:spPr>
+        <p:txBody xmlns:a="http://schemas.openxmlformats.org/drawingml/2006/main">
+          <a:bodyPr/>
+          <a:p/>
+        </p:txBody>
       </p:sp>
       <p:sp>
         <p:nvSpPr>
@@ -19106,6 +19482,10 @@
             <a:prstDash val="solid"/>
           </a:ln>
         </p:spPr>
+        <p:txBody xmlns:a="http://schemas.openxmlformats.org/drawingml/2006/main">
+          <a:bodyPr/>
+          <a:p/>
+        </p:txBody>
       </p:sp>
       <p:sp>
         <p:nvSpPr>
@@ -19228,6 +19608,10 @@
             <a:prstDash val="solid"/>
           </a:ln>
         </p:spPr>
+        <p:txBody xmlns:a="http://schemas.openxmlformats.org/drawingml/2006/main">
+          <a:bodyPr/>
+          <a:p/>
+        </p:txBody>
       </p:sp>
       <p:sp>
         <p:nvSpPr>
@@ -19377,6 +19761,10 @@
             <a:prstDash val="solid"/>
           </a:ln>
         </p:spPr>
+        <p:txBody xmlns:a="http://schemas.openxmlformats.org/drawingml/2006/main">
+          <a:bodyPr/>
+          <a:p/>
+        </p:txBody>
       </p:sp>
       <p:sp>
         <p:nvSpPr>
@@ -19530,6 +19918,10 @@
             <a:prstDash val="solid"/>
           </a:ln>
         </p:spPr>
+        <p:txBody xmlns:a="http://schemas.openxmlformats.org/drawingml/2006/main">
+          <a:bodyPr/>
+          <a:p/>
+        </p:txBody>
       </p:sp>
       <p:sp>
         <p:nvSpPr>
@@ -19685,6 +20077,10 @@
             <a:prstDash val="solid"/>
           </a:ln>
         </p:spPr>
+        <p:txBody xmlns:a="http://schemas.openxmlformats.org/drawingml/2006/main">
+          <a:bodyPr/>
+          <a:p/>
+        </p:txBody>
       </p:sp>
       <p:sp>
         <p:nvSpPr>
@@ -19840,6 +20236,10 @@
             <a:prstDash val="solid"/>
           </a:ln>
         </p:spPr>
+        <p:txBody xmlns:a="http://schemas.openxmlformats.org/drawingml/2006/main">
+          <a:bodyPr/>
+          <a:p/>
+        </p:txBody>
       </p:sp>
       <p:sp>
         <p:nvSpPr>
@@ -19995,6 +20395,10 @@
             <a:prstDash val="solid"/>
           </a:ln>
         </p:spPr>
+        <p:txBody xmlns:a="http://schemas.openxmlformats.org/drawingml/2006/main">
+          <a:bodyPr/>
+          <a:p/>
+        </p:txBody>
       </p:sp>
       <p:sp>
         <p:nvSpPr>
@@ -20150,6 +20554,10 @@
             <a:prstDash val="solid"/>
           </a:ln>
         </p:spPr>
+        <p:txBody xmlns:a="http://schemas.openxmlformats.org/drawingml/2006/main">
+          <a:bodyPr/>
+          <a:p/>
+        </p:txBody>
       </p:sp>
       <p:sp>
         <p:nvSpPr>
@@ -20305,6 +20713,10 @@
             <a:prstDash val="solid"/>
           </a:ln>
         </p:spPr>
+        <p:txBody xmlns:a="http://schemas.openxmlformats.org/drawingml/2006/main">
+          <a:bodyPr/>
+          <a:p/>
+        </p:txBody>
       </p:sp>
       <p:sp>
         <p:nvSpPr>
@@ -20460,6 +20872,10 @@
             <a:prstDash val="solid"/>
           </a:ln>
         </p:spPr>
+        <p:txBody xmlns:a="http://schemas.openxmlformats.org/drawingml/2006/main">
+          <a:bodyPr/>
+          <a:p/>
+        </p:txBody>
       </p:sp>
       <p:sp>
         <p:nvSpPr>
@@ -20615,6 +21031,10 @@
             <a:prstDash val="solid"/>
           </a:ln>
         </p:spPr>
+        <p:txBody xmlns:a="http://schemas.openxmlformats.org/drawingml/2006/main">
+          <a:bodyPr/>
+          <a:p/>
+        </p:txBody>
       </p:sp>
       <p:sp>
         <p:nvSpPr>
@@ -20770,6 +21190,10 @@
             <a:prstDash val="solid"/>
           </a:ln>
         </p:spPr>
+        <p:txBody xmlns:a="http://schemas.openxmlformats.org/drawingml/2006/main">
+          <a:bodyPr/>
+          <a:p/>
+        </p:txBody>
       </p:sp>
       <p:sp>
         <p:nvSpPr>
@@ -20925,6 +21349,10 @@
             <a:prstDash val="solid"/>
           </a:ln>
         </p:spPr>
+        <p:txBody xmlns:a="http://schemas.openxmlformats.org/drawingml/2006/main">
+          <a:bodyPr/>
+          <a:p/>
+        </p:txBody>
       </p:sp>
       <p:sp>
         <p:nvSpPr>
@@ -21047,6 +21475,10 @@
             <a:prstDash val="solid"/>
           </a:ln>
         </p:spPr>
+        <p:txBody xmlns:a="http://schemas.openxmlformats.org/drawingml/2006/main">
+          <a:bodyPr/>
+          <a:p/>
+        </p:txBody>
       </p:sp>
       <p:sp>
         <p:nvSpPr>
@@ -21200,6 +21632,10 @@
             <a:prstDash val="solid"/>
           </a:ln>
         </p:spPr>
+        <p:txBody xmlns:a="http://schemas.openxmlformats.org/drawingml/2006/main">
+          <a:bodyPr/>
+          <a:p/>
+        </p:txBody>
       </p:sp>
       <p:sp>
         <p:nvSpPr>
@@ -21355,6 +21791,10 @@
             <a:prstDash val="solid"/>
           </a:ln>
         </p:spPr>
+        <p:txBody xmlns:a="http://schemas.openxmlformats.org/drawingml/2006/main">
+          <a:bodyPr/>
+          <a:p/>
+        </p:txBody>
       </p:sp>
       <p:sp>
         <p:nvSpPr>
@@ -21591,6 +22031,10 @@
             <a:prstDash val="solid"/>
           </a:ln>
         </p:spPr>
+        <p:txBody xmlns:a="http://schemas.openxmlformats.org/drawingml/2006/main">
+          <a:bodyPr/>
+          <a:p/>
+        </p:txBody>
       </p:sp>
       <p:sp>
         <p:nvSpPr>
@@ -21914,6 +22358,10 @@
             <a:prstDash val="solid"/>
           </a:ln>
         </p:spPr>
+        <p:txBody xmlns:a="http://schemas.openxmlformats.org/drawingml/2006/main">
+          <a:bodyPr/>
+          <a:p/>
+        </p:txBody>
       </p:sp>
       <p:sp>
         <p:nvSpPr>
@@ -22067,6 +22515,10 @@
             <a:prstDash val="solid"/>
           </a:ln>
         </p:spPr>
+        <p:txBody xmlns:a="http://schemas.openxmlformats.org/drawingml/2006/main">
+          <a:bodyPr/>
+          <a:p/>
+        </p:txBody>
       </p:sp>
       <p:sp>
         <p:nvSpPr>
@@ -22222,6 +22674,10 @@
             <a:prstDash val="solid"/>
           </a:ln>
         </p:spPr>
+        <p:txBody xmlns:a="http://schemas.openxmlformats.org/drawingml/2006/main">
+          <a:bodyPr/>
+          <a:p/>
+        </p:txBody>
       </p:sp>
       <p:sp>
         <p:nvSpPr>
@@ -22255,6 +22711,10 @@
             <a:prstDash val="solid"/>
           </a:ln>
         </p:spPr>
+        <p:txBody xmlns:a="http://schemas.openxmlformats.org/drawingml/2006/main">
+          <a:bodyPr/>
+          <a:p/>
+        </p:txBody>
       </p:sp>
       <p:sp>
         <p:nvSpPr>
@@ -22410,6 +22870,10 @@
             <a:prstDash val="solid"/>
           </a:ln>
         </p:spPr>
+        <p:txBody xmlns:a="http://schemas.openxmlformats.org/drawingml/2006/main">
+          <a:bodyPr/>
+          <a:p/>
+        </p:txBody>
       </p:sp>
       <p:sp>
         <p:nvSpPr>
@@ -22443,6 +22907,10 @@
             <a:prstDash val="solid"/>
           </a:ln>
         </p:spPr>
+        <p:txBody xmlns:a="http://schemas.openxmlformats.org/drawingml/2006/main">
+          <a:bodyPr/>
+          <a:p/>
+        </p:txBody>
       </p:sp>
       <p:sp>
         <p:nvSpPr>
@@ -22598,6 +23066,10 @@
             <a:prstDash val="solid"/>
           </a:ln>
         </p:spPr>
+        <p:txBody xmlns:a="http://schemas.openxmlformats.org/drawingml/2006/main">
+          <a:bodyPr/>
+          <a:p/>
+        </p:txBody>
       </p:sp>
       <p:sp>
         <p:nvSpPr>
@@ -22631,6 +23103,10 @@
             <a:prstDash val="solid"/>
           </a:ln>
         </p:spPr>
+        <p:txBody xmlns:a="http://schemas.openxmlformats.org/drawingml/2006/main">
+          <a:bodyPr/>
+          <a:p/>
+        </p:txBody>
       </p:sp>
       <p:sp>
         <p:nvSpPr>
@@ -22933,6 +23409,10 @@
             <a:prstDash val="solid"/>
           </a:ln>
         </p:spPr>
+        <p:txBody xmlns:a="http://schemas.openxmlformats.org/drawingml/2006/main">
+          <a:bodyPr/>
+          <a:p/>
+        </p:txBody>
       </p:sp>
       <p:sp>
         <p:nvSpPr>
@@ -23086,6 +23566,10 @@
             <a:prstDash val="solid"/>
           </a:ln>
         </p:spPr>
+        <p:txBody xmlns:a="http://schemas.openxmlformats.org/drawingml/2006/main">
+          <a:bodyPr/>
+          <a:p/>
+        </p:txBody>
       </p:sp>
       <p:sp>
         <p:nvSpPr>
@@ -23241,6 +23725,10 @@
             <a:prstDash val="solid"/>
           </a:ln>
         </p:spPr>
+        <p:txBody xmlns:a="http://schemas.openxmlformats.org/drawingml/2006/main">
+          <a:bodyPr/>
+          <a:p/>
+        </p:txBody>
       </p:sp>
       <p:sp>
         <p:nvSpPr>
@@ -23274,6 +23762,10 @@
             <a:prstDash val="solid"/>
           </a:ln>
         </p:spPr>
+        <p:txBody xmlns:a="http://schemas.openxmlformats.org/drawingml/2006/main">
+          <a:bodyPr/>
+          <a:p/>
+        </p:txBody>
       </p:sp>
       <p:sp>
         <p:nvSpPr>
@@ -23489,6 +23981,10 @@
             <a:prstDash val="solid"/>
           </a:ln>
         </p:spPr>
+        <p:txBody xmlns:a="http://schemas.openxmlformats.org/drawingml/2006/main">
+          <a:bodyPr/>
+          <a:p/>
+        </p:txBody>
       </p:sp>
       <p:sp>
         <p:nvSpPr>
@@ -23522,6 +24018,10 @@
             <a:prstDash val="solid"/>
           </a:ln>
         </p:spPr>
+        <p:txBody xmlns:a="http://schemas.openxmlformats.org/drawingml/2006/main">
+          <a:bodyPr/>
+          <a:p/>
+        </p:txBody>
       </p:sp>
       <p:sp>
         <p:nvSpPr>
@@ -23737,6 +24237,10 @@
             <a:prstDash val="solid"/>
           </a:ln>
         </p:spPr>
+        <p:txBody xmlns:a="http://schemas.openxmlformats.org/drawingml/2006/main">
+          <a:bodyPr/>
+          <a:p/>
+        </p:txBody>
       </p:sp>
       <p:sp>
         <p:nvSpPr>
@@ -23770,6 +24274,10 @@
             <a:prstDash val="solid"/>
           </a:ln>
         </p:spPr>
+        <p:txBody xmlns:a="http://schemas.openxmlformats.org/drawingml/2006/main">
+          <a:bodyPr/>
+          <a:p/>
+        </p:txBody>
       </p:sp>
       <p:sp>
         <p:nvSpPr>
@@ -23985,6 +24493,10 @@
             <a:prstDash val="solid"/>
           </a:ln>
         </p:spPr>
+        <p:txBody xmlns:a="http://schemas.openxmlformats.org/drawingml/2006/main">
+          <a:bodyPr/>
+          <a:p/>
+        </p:txBody>
       </p:sp>
       <p:sp>
         <p:nvSpPr>
@@ -24018,6 +24530,10 @@
             <a:prstDash val="solid"/>
           </a:ln>
         </p:spPr>
+        <p:txBody xmlns:a="http://schemas.openxmlformats.org/drawingml/2006/main">
+          <a:bodyPr/>
+          <a:p/>
+        </p:txBody>
       </p:sp>
       <p:sp>
         <p:nvSpPr>
@@ -24320,6 +24836,10 @@
             <a:prstDash val="solid"/>
           </a:ln>
         </p:spPr>
+        <p:txBody xmlns:a="http://schemas.openxmlformats.org/drawingml/2006/main">
+          <a:bodyPr/>
+          <a:p/>
+        </p:txBody>
       </p:sp>
       <p:sp>
         <p:nvSpPr>
@@ -24473,6 +24993,10 @@
             <a:prstDash val="solid"/>
           </a:ln>
         </p:spPr>
+        <p:txBody xmlns:a="http://schemas.openxmlformats.org/drawingml/2006/main">
+          <a:bodyPr/>
+          <a:p/>
+        </p:txBody>
       </p:sp>
       <p:sp>
         <p:nvSpPr>
@@ -24628,6 +25152,10 @@
             <a:prstDash val="solid"/>
           </a:ln>
         </p:spPr>
+        <p:txBody xmlns:a="http://schemas.openxmlformats.org/drawingml/2006/main">
+          <a:bodyPr/>
+          <a:p/>
+        </p:txBody>
       </p:sp>
       <p:sp>
         <p:nvSpPr>
@@ -24843,6 +25371,10 @@
             <a:prstDash val="solid"/>
           </a:ln>
         </p:spPr>
+        <p:txBody xmlns:a="http://schemas.openxmlformats.org/drawingml/2006/main">
+          <a:bodyPr/>
+          <a:p/>
+        </p:txBody>
       </p:sp>
       <p:sp>
         <p:nvSpPr>
@@ -25058,6 +25590,10 @@
             <a:prstDash val="solid"/>
           </a:ln>
         </p:spPr>
+        <p:txBody xmlns:a="http://schemas.openxmlformats.org/drawingml/2006/main">
+          <a:bodyPr/>
+          <a:p/>
+        </p:txBody>
       </p:sp>
       <p:sp>
         <p:nvSpPr>
@@ -25213,6 +25749,10 @@
             <a:prstDash val="solid"/>
           </a:ln>
         </p:spPr>
+        <p:txBody xmlns:a="http://schemas.openxmlformats.org/drawingml/2006/main">
+          <a:bodyPr/>
+          <a:p/>
+        </p:txBody>
       </p:sp>
       <p:sp>
         <p:nvSpPr>
@@ -25596,6 +26136,10 @@
             <a:prstDash val="solid"/>
           </a:ln>
         </p:spPr>
+        <p:txBody xmlns:a="http://schemas.openxmlformats.org/drawingml/2006/main">
+          <a:bodyPr/>
+          <a:p/>
+        </p:txBody>
       </p:sp>
       <p:sp>
         <p:nvSpPr>
@@ -25749,6 +26293,10 @@
             <a:prstDash val="solid"/>
           </a:ln>
         </p:spPr>
+        <p:txBody xmlns:a="http://schemas.openxmlformats.org/drawingml/2006/main">
+          <a:bodyPr/>
+          <a:p/>
+        </p:txBody>
       </p:sp>
       <p:sp>
         <p:nvSpPr>
@@ -26379,6 +26927,10 @@
             <a:prstDash val="solid"/>
           </a:ln>
         </p:spPr>
+        <p:txBody xmlns:a="http://schemas.openxmlformats.org/drawingml/2006/main">
+          <a:bodyPr/>
+          <a:p/>
+        </p:txBody>
       </p:sp>
       <p:sp>
         <p:nvSpPr>
@@ -26735,6 +27287,10 @@
             <a:prstDash val="solid"/>
           </a:ln>
         </p:spPr>
+        <p:txBody xmlns:a="http://schemas.openxmlformats.org/drawingml/2006/main">
+          <a:bodyPr/>
+          <a:p/>
+        </p:txBody>
       </p:sp>
       <p:sp>
         <p:nvSpPr>
@@ -26888,6 +27444,10 @@
             <a:prstDash val="solid"/>
           </a:ln>
         </p:spPr>
+        <p:txBody xmlns:a="http://schemas.openxmlformats.org/drawingml/2006/main">
+          <a:bodyPr/>
+          <a:p/>
+        </p:txBody>
       </p:sp>
       <p:sp>
         <p:nvSpPr>
@@ -27310,6 +27870,10 @@
             <a:prstDash val="solid"/>
           </a:ln>
         </p:spPr>
+        <p:txBody xmlns:a="http://schemas.openxmlformats.org/drawingml/2006/main">
+          <a:bodyPr/>
+          <a:p/>
+        </p:txBody>
       </p:sp>
       <p:sp>
         <p:nvSpPr>
@@ -27345,6 +27909,10 @@
             <a:prstDash val="solid"/>
           </a:ln>
         </p:spPr>
+        <p:txBody xmlns:a="http://schemas.openxmlformats.org/drawingml/2006/main">
+          <a:bodyPr/>
+          <a:p/>
+        </p:txBody>
       </p:sp>
       <p:sp>
         <p:nvSpPr>
@@ -27560,6 +28128,10 @@
             <a:prstDash val="solid"/>
           </a:ln>
         </p:spPr>
+        <p:txBody xmlns:a="http://schemas.openxmlformats.org/drawingml/2006/main">
+          <a:bodyPr/>
+          <a:p/>
+        </p:txBody>
       </p:sp>
       <p:sp>
         <p:nvSpPr>
@@ -27775,6 +28347,10 @@
             <a:prstDash val="solid"/>
           </a:ln>
         </p:spPr>
+        <p:txBody xmlns:a="http://schemas.openxmlformats.org/drawingml/2006/main">
+          <a:bodyPr/>
+          <a:p/>
+        </p:txBody>
       </p:sp>
       <p:sp>
         <p:nvSpPr>
@@ -27990,6 +28566,10 @@
             <a:prstDash val="solid"/>
           </a:ln>
         </p:spPr>
+        <p:txBody xmlns:a="http://schemas.openxmlformats.org/drawingml/2006/main">
+          <a:bodyPr/>
+          <a:p/>
+        </p:txBody>
       </p:sp>
       <p:sp>
         <p:nvSpPr>
@@ -28205,6 +28785,10 @@
             <a:prstDash val="solid"/>
           </a:ln>
         </p:spPr>
+        <p:txBody xmlns:a="http://schemas.openxmlformats.org/drawingml/2006/main">
+          <a:bodyPr/>
+          <a:p/>
+        </p:txBody>
       </p:sp>
       <p:sp>
         <p:nvSpPr>
@@ -28381,6 +28965,10 @@
             <a:prstDash val="solid"/>
           </a:ln>
         </p:spPr>
+        <p:txBody xmlns:a="http://schemas.openxmlformats.org/drawingml/2006/main">
+          <a:bodyPr/>
+          <a:p/>
+        </p:txBody>
       </p:sp>
       <p:sp>
         <p:nvSpPr>
@@ -28534,6 +29122,10 @@
             <a:prstDash val="solid"/>
           </a:ln>
         </p:spPr>
+        <p:txBody xmlns:a="http://schemas.openxmlformats.org/drawingml/2006/main">
+          <a:bodyPr/>
+          <a:p/>
+        </p:txBody>
       </p:sp>
       <p:sp>
         <p:nvSpPr>
@@ -28687,6 +29279,10 @@
             <a:prstDash val="solid"/>
           </a:ln>
         </p:spPr>
+        <p:txBody xmlns:a="http://schemas.openxmlformats.org/drawingml/2006/main">
+          <a:bodyPr/>
+          <a:p/>
+        </p:txBody>
       </p:sp>
       <p:sp>
         <p:nvSpPr>
@@ -28869,6 +29465,10 @@
             <a:prstDash val="solid"/>
           </a:ln>
         </p:spPr>
+        <p:txBody xmlns:a="http://schemas.openxmlformats.org/drawingml/2006/main">
+          <a:bodyPr/>
+          <a:p/>
+        </p:txBody>
       </p:sp>
       <p:sp>
         <p:nvSpPr>
@@ -28964,6 +29564,10 @@
             <a:prstDash val="solid"/>
           </a:ln>
         </p:spPr>
+        <p:txBody xmlns:a="http://schemas.openxmlformats.org/drawingml/2006/main">
+          <a:bodyPr/>
+          <a:p/>
+        </p:txBody>
       </p:sp>
       <p:sp>
         <p:nvSpPr>
@@ -29059,6 +29663,10 @@
             <a:prstDash val="solid"/>
           </a:ln>
         </p:spPr>
+        <p:txBody xmlns:a="http://schemas.openxmlformats.org/drawingml/2006/main">
+          <a:bodyPr/>
+          <a:p/>
+        </p:txBody>
       </p:sp>
       <p:sp>
         <p:nvSpPr>
@@ -29154,6 +29762,10 @@
             <a:prstDash val="solid"/>
           </a:ln>
         </p:spPr>
+        <p:txBody xmlns:a="http://schemas.openxmlformats.org/drawingml/2006/main">
+          <a:bodyPr/>
+          <a:p/>
+        </p:txBody>
       </p:sp>
       <p:sp>
         <p:nvSpPr>
@@ -29249,6 +29861,10 @@
             <a:prstDash val="solid"/>
           </a:ln>
         </p:spPr>
+        <p:txBody xmlns:a="http://schemas.openxmlformats.org/drawingml/2006/main">
+          <a:bodyPr/>
+          <a:p/>
+        </p:txBody>
       </p:sp>
       <p:sp>
         <p:nvSpPr>
@@ -29344,6 +29960,10 @@
             <a:prstDash val="solid"/>
           </a:ln>
         </p:spPr>
+        <p:txBody xmlns:a="http://schemas.openxmlformats.org/drawingml/2006/main">
+          <a:bodyPr/>
+          <a:p/>
+        </p:txBody>
       </p:sp>
       <p:sp>
         <p:nvSpPr>
@@ -29439,6 +30059,10 @@
             <a:prstDash val="solid"/>
           </a:ln>
         </p:spPr>
+        <p:txBody xmlns:a="http://schemas.openxmlformats.org/drawingml/2006/main">
+          <a:bodyPr/>
+          <a:p/>
+        </p:txBody>
       </p:sp>
       <p:sp>
         <p:nvSpPr>
@@ -29534,6 +30158,10 @@
             <a:prstDash val="solid"/>
           </a:ln>
         </p:spPr>
+        <p:txBody xmlns:a="http://schemas.openxmlformats.org/drawingml/2006/main">
+          <a:bodyPr/>
+          <a:p/>
+        </p:txBody>
       </p:sp>
       <p:sp>
         <p:nvSpPr>
@@ -29629,6 +30257,10 @@
             <a:prstDash val="solid"/>
           </a:ln>
         </p:spPr>
+        <p:txBody xmlns:a="http://schemas.openxmlformats.org/drawingml/2006/main">
+          <a:bodyPr/>
+          <a:p/>
+        </p:txBody>
       </p:sp>
       <p:sp>
         <p:nvSpPr>
@@ -29898,6 +30530,10 @@
             <a:prstDash val="solid"/>
           </a:ln>
         </p:spPr>
+        <p:txBody xmlns:a="http://schemas.openxmlformats.org/drawingml/2006/main">
+          <a:bodyPr/>
+          <a:p/>
+        </p:txBody>
       </p:sp>
       <p:sp>
         <p:nvSpPr>
@@ -30051,6 +30687,10 @@
             <a:prstDash val="solid"/>
           </a:ln>
         </p:spPr>
+        <p:txBody xmlns:a="http://schemas.openxmlformats.org/drawingml/2006/main">
+          <a:bodyPr/>
+          <a:p/>
+        </p:txBody>
       </p:sp>
       <p:sp>
         <p:nvSpPr>
@@ -30985,6 +31625,10 @@
             <a:prstDash val="solid"/>
           </a:ln>
         </p:spPr>
+        <p:txBody xmlns:a="http://schemas.openxmlformats.org/drawingml/2006/main">
+          <a:bodyPr/>
+          <a:p/>
+        </p:txBody>
       </p:sp>
       <p:sp>
         <p:nvSpPr>
@@ -31138,6 +31782,10 @@
             <a:prstDash val="solid"/>
           </a:ln>
         </p:spPr>
+        <p:txBody xmlns:a="http://schemas.openxmlformats.org/drawingml/2006/main">
+          <a:bodyPr/>
+          <a:p/>
+        </p:txBody>
       </p:sp>
       <p:sp>
         <p:nvSpPr>
@@ -31293,6 +31941,10 @@
             <a:prstDash val="solid"/>
           </a:ln>
         </p:spPr>
+        <p:txBody xmlns:a="http://schemas.openxmlformats.org/drawingml/2006/main">
+          <a:bodyPr/>
+          <a:p/>
+        </p:txBody>
       </p:sp>
       <p:sp>
         <p:nvSpPr>
@@ -31326,6 +31978,10 @@
             <a:prstDash val="solid"/>
           </a:ln>
         </p:spPr>
+        <p:txBody xmlns:a="http://schemas.openxmlformats.org/drawingml/2006/main">
+          <a:bodyPr/>
+          <a:p/>
+        </p:txBody>
       </p:sp>
       <p:sp>
         <p:nvSpPr>
@@ -31595,6 +32251,10 @@
             <a:prstDash val="solid"/>
           </a:ln>
         </p:spPr>
+        <p:txBody xmlns:a="http://schemas.openxmlformats.org/drawingml/2006/main">
+          <a:bodyPr/>
+          <a:p/>
+        </p:txBody>
       </p:sp>
       <p:sp>
         <p:nvSpPr>
@@ -31628,6 +32288,10 @@
             <a:prstDash val="solid"/>
           </a:ln>
         </p:spPr>
+        <p:txBody xmlns:a="http://schemas.openxmlformats.org/drawingml/2006/main">
+          <a:bodyPr/>
+          <a:p/>
+        </p:txBody>
       </p:sp>
       <p:sp>
         <p:nvSpPr>
@@ -31897,6 +32561,10 @@
             <a:prstDash val="solid"/>
           </a:ln>
         </p:spPr>
+        <p:txBody xmlns:a="http://schemas.openxmlformats.org/drawingml/2006/main">
+          <a:bodyPr/>
+          <a:p/>
+        </p:txBody>
       </p:sp>
       <p:sp>
         <p:nvSpPr>
@@ -31930,6 +32598,10 @@
             <a:prstDash val="solid"/>
           </a:ln>
         </p:spPr>
+        <p:txBody xmlns:a="http://schemas.openxmlformats.org/drawingml/2006/main">
+          <a:bodyPr/>
+          <a:p/>
+        </p:txBody>
       </p:sp>
       <p:sp>
         <p:nvSpPr>
@@ -32199,6 +32871,10 @@
             <a:prstDash val="solid"/>
           </a:ln>
         </p:spPr>
+        <p:txBody xmlns:a="http://schemas.openxmlformats.org/drawingml/2006/main">
+          <a:bodyPr/>
+          <a:p/>
+        </p:txBody>
       </p:sp>
       <p:sp>
         <p:nvSpPr>
